--- a/Skermskote en Video/Fase5 - Demo Video's/Aanbieding.pptx
+++ b/Skermskote en Video/Fase5 - Demo Video's/Aanbieding.pptx
@@ -6077,8 +6077,8 @@
         </p:nvSpPr>
         <p:spPr>
           <a:xfrm>
-            <a:off x="5500688" y="4316611"/>
-            <a:ext cx="3000375" cy="264319"/>
+            <a:off x="5500689" y="4316611"/>
+            <a:ext cx="2857500" cy="264319"/>
           </a:xfrm>
           <a:prstGeom prst="rect">
             <a:avLst/>
@@ -8501,6 +8501,92 @@
           </a:p>
         </p:txBody>
       </p:sp>
+      <p:cxnSp>
+        <p:nvCxnSpPr>
+          <p:cNvPr id="32" name="Straight Connector 31">
+            <a:extLst>
+              <a:ext uri="{FF2B5EF4-FFF2-40B4-BE49-F238E27FC236}">
+                <a16:creationId xmlns:a16="http://schemas.microsoft.com/office/drawing/2014/main" id="{884D2678-1897-4FFD-D081-FF3ACA359924}"/>
+              </a:ext>
+            </a:extLst>
+          </p:cNvPr>
+          <p:cNvCxnSpPr/>
+          <p:nvPr/>
+        </p:nvCxnSpPr>
+        <p:spPr>
+          <a:xfrm>
+            <a:off x="571500" y="4532709"/>
+            <a:ext cx="8001000" cy="0"/>
+          </a:xfrm>
+          <a:prstGeom prst="line">
+            <a:avLst/>
+          </a:prstGeom>
+          <a:ln>
+            <a:solidFill>
+              <a:schemeClr val="bg1">
+                <a:lumMod val="75000"/>
+              </a:schemeClr>
+            </a:solidFill>
+          </a:ln>
+        </p:spPr>
+        <p:style>
+          <a:lnRef idx="1">
+            <a:schemeClr val="accent1"/>
+          </a:lnRef>
+          <a:fillRef idx="0">
+            <a:schemeClr val="accent1"/>
+          </a:fillRef>
+          <a:effectRef idx="0">
+            <a:schemeClr val="accent1"/>
+          </a:effectRef>
+          <a:fontRef idx="minor">
+            <a:schemeClr val="tx1"/>
+          </a:fontRef>
+        </p:style>
+      </p:cxnSp>
+      <p:cxnSp>
+        <p:nvCxnSpPr>
+          <p:cNvPr id="33" name="Straight Connector 32">
+            <a:extLst>
+              <a:ext uri="{FF2B5EF4-FFF2-40B4-BE49-F238E27FC236}">
+                <a16:creationId xmlns:a16="http://schemas.microsoft.com/office/drawing/2014/main" id="{6086C3BE-8506-4028-70B4-63D047DDC380}"/>
+              </a:ext>
+            </a:extLst>
+          </p:cNvPr>
+          <p:cNvCxnSpPr/>
+          <p:nvPr/>
+        </p:nvCxnSpPr>
+        <p:spPr>
+          <a:xfrm>
+            <a:off x="571500" y="4887002"/>
+            <a:ext cx="8001000" cy="0"/>
+          </a:xfrm>
+          <a:prstGeom prst="line">
+            <a:avLst/>
+          </a:prstGeom>
+          <a:ln>
+            <a:solidFill>
+              <a:schemeClr val="bg1">
+                <a:lumMod val="75000"/>
+              </a:schemeClr>
+            </a:solidFill>
+          </a:ln>
+        </p:spPr>
+        <p:style>
+          <a:lnRef idx="1">
+            <a:schemeClr val="accent1"/>
+          </a:lnRef>
+          <a:fillRef idx="0">
+            <a:schemeClr val="accent1"/>
+          </a:fillRef>
+          <a:effectRef idx="0">
+            <a:schemeClr val="accent1"/>
+          </a:effectRef>
+          <a:fontRef idx="minor">
+            <a:schemeClr val="tx1"/>
+          </a:fontRef>
+        </p:style>
+      </p:cxnSp>
     </p:spTree>
   </p:cSld>
   <p:clrMapOvr>

--- a/Skermskote en Video/Fase5 - Demo Video's/Aanbieding.pptx
+++ b/Skermskote en Video/Fase5 - Demo Video's/Aanbieding.pptx
@@ -4056,60 +4056,6 @@
       </p:sp>
       <p:sp>
         <p:nvSpPr>
-          <p:cNvPr id="27" name="Rectangle 26">
-            <a:extLst>
-              <a:ext uri="{FF2B5EF4-FFF2-40B4-BE49-F238E27FC236}">
-                <a16:creationId xmlns:a16="http://schemas.microsoft.com/office/drawing/2014/main" id="{916E995D-A044-E9B8-92DA-567347BC4202}"/>
-              </a:ext>
-            </a:extLst>
-          </p:cNvPr>
-          <p:cNvSpPr/>
-          <p:nvPr/>
-        </p:nvSpPr>
-        <p:spPr>
-          <a:xfrm>
-            <a:off x="571500" y="1080492"/>
-            <a:ext cx="4611988" cy="2886075"/>
-          </a:xfrm>
-          <a:prstGeom prst="rect">
-            <a:avLst/>
-          </a:prstGeom>
-          <a:solidFill>
-            <a:srgbClr val="2D4D35"/>
-          </a:solidFill>
-          <a:ln w="28575">
-            <a:solidFill>
-              <a:srgbClr val="1B3022"/>
-            </a:solidFill>
-          </a:ln>
-        </p:spPr>
-        <p:style>
-          <a:lnRef idx="2">
-            <a:schemeClr val="accent1">
-              <a:shade val="15000"/>
-            </a:schemeClr>
-          </a:lnRef>
-          <a:fillRef idx="1">
-            <a:schemeClr val="accent1"/>
-          </a:fillRef>
-          <a:effectRef idx="0">
-            <a:schemeClr val="accent1"/>
-          </a:effectRef>
-          <a:fontRef idx="minor">
-            <a:schemeClr val="lt1"/>
-          </a:fontRef>
-        </p:style>
-        <p:txBody>
-          <a:bodyPr rtlCol="0" anchor="ctr"/>
-          <a:lstStyle/>
-          <a:p>
-            <a:pPr algn="ctr"/>
-            <a:endParaRPr lang="af-ZA" noProof="0" dirty="0"/>
-          </a:p>
-        </p:txBody>
-      </p:sp>
-      <p:sp>
-        <p:nvSpPr>
           <p:cNvPr id="9" name="Text 4"/>
           <p:cNvSpPr/>
           <p:nvPr/>
@@ -4755,506 +4701,604 @@
           </a:p>
         </p:txBody>
       </p:sp>
-      <p:pic>
-        <p:nvPicPr>
-          <p:cNvPr id="31" name="Picture 30">
+      <p:grpSp>
+        <p:nvGrpSpPr>
+          <p:cNvPr id="8" name="Group 7">
             <a:extLst>
               <a:ext uri="{FF2B5EF4-FFF2-40B4-BE49-F238E27FC236}">
-                <a16:creationId xmlns:a16="http://schemas.microsoft.com/office/drawing/2014/main" id="{C56CD78B-6B15-B355-C11B-F5E5FC90BD9C}"/>
+                <a16:creationId xmlns:a16="http://schemas.microsoft.com/office/drawing/2014/main" id="{937B8B89-59AF-0E96-EBF5-A50EB3F495B7}"/>
               </a:ext>
             </a:extLst>
           </p:cNvPr>
-          <p:cNvPicPr>
-            <a:picLocks noChangeAspect="1"/>
-          </p:cNvPicPr>
-          <p:nvPr/>
-        </p:nvPicPr>
-        <p:blipFill>
-          <a:blip r:embed="rId4"/>
-          <a:srcRect/>
-          <a:stretch/>
-        </p:blipFill>
-        <p:spPr>
-          <a:xfrm>
-            <a:off x="742334" y="1313583"/>
-            <a:ext cx="4267620" cy="2495517"/>
-          </a:xfrm>
-          <a:prstGeom prst="rect">
-            <a:avLst/>
-          </a:prstGeom>
-        </p:spPr>
-      </p:pic>
-      <p:sp>
-        <p:nvSpPr>
-          <p:cNvPr id="32" name="Rectangle 31">
-            <a:extLst>
-              <a:ext uri="{FF2B5EF4-FFF2-40B4-BE49-F238E27FC236}">
-                <a16:creationId xmlns:a16="http://schemas.microsoft.com/office/drawing/2014/main" id="{B8B6CF8C-A31B-CB86-547D-0DC748EAD3C9}"/>
-              </a:ext>
-            </a:extLst>
-          </p:cNvPr>
-          <p:cNvSpPr/>
-          <p:nvPr/>
-        </p:nvSpPr>
-        <p:spPr>
-          <a:xfrm>
-            <a:off x="1857829" y="2038801"/>
-            <a:ext cx="177800" cy="393954"/>
-          </a:xfrm>
-          <a:prstGeom prst="rect">
-            <a:avLst/>
-          </a:prstGeom>
-          <a:solidFill>
-            <a:srgbClr val="2D4D35"/>
-          </a:solidFill>
-          <a:ln>
-            <a:noFill/>
-          </a:ln>
-        </p:spPr>
-        <p:style>
-          <a:lnRef idx="2">
-            <a:schemeClr val="accent1">
-              <a:shade val="15000"/>
-            </a:schemeClr>
-          </a:lnRef>
-          <a:fillRef idx="1">
-            <a:schemeClr val="accent1"/>
-          </a:fillRef>
-          <a:effectRef idx="0">
-            <a:schemeClr val="accent1"/>
-          </a:effectRef>
-          <a:fontRef idx="minor">
-            <a:schemeClr val="lt1"/>
-          </a:fontRef>
-        </p:style>
-        <p:txBody>
-          <a:bodyPr rtlCol="0" anchor="ctr"/>
-          <a:lstStyle/>
-          <a:p>
-            <a:pPr algn="ctr"/>
-            <a:endParaRPr lang="af-ZA" noProof="0" dirty="0"/>
-          </a:p>
-        </p:txBody>
-      </p:sp>
-      <p:cxnSp>
-        <p:nvCxnSpPr>
-          <p:cNvPr id="34" name="Straight Arrow Connector 33">
-            <a:extLst>
-              <a:ext uri="{FF2B5EF4-FFF2-40B4-BE49-F238E27FC236}">
-                <a16:creationId xmlns:a16="http://schemas.microsoft.com/office/drawing/2014/main" id="{A702B211-97A6-50F3-6426-232AE5A85133}"/>
-              </a:ext>
-            </a:extLst>
-          </p:cNvPr>
-          <p:cNvCxnSpPr/>
-          <p:nvPr/>
-        </p:nvCxnSpPr>
-        <p:spPr>
-          <a:xfrm>
-            <a:off x="1944914" y="2038801"/>
-            <a:ext cx="0" cy="402883"/>
-          </a:xfrm>
-          <a:prstGeom prst="straightConnector1">
-            <a:avLst/>
-          </a:prstGeom>
-          <a:ln>
+          <p:cNvGrpSpPr/>
+          <p:nvPr/>
+        </p:nvGrpSpPr>
+        <p:grpSpPr>
+          <a:xfrm>
+            <a:off x="571500" y="1080492"/>
+            <a:ext cx="4611988" cy="2886075"/>
+            <a:chOff x="571500" y="1080492"/>
+            <a:chExt cx="4611988" cy="2886075"/>
+          </a:xfrm>
+        </p:grpSpPr>
+        <p:sp>
+          <p:nvSpPr>
+            <p:cNvPr id="27" name="Rectangle 26">
+              <a:extLst>
+                <a:ext uri="{FF2B5EF4-FFF2-40B4-BE49-F238E27FC236}">
+                  <a16:creationId xmlns:a16="http://schemas.microsoft.com/office/drawing/2014/main" id="{916E995D-A044-E9B8-92DA-567347BC4202}"/>
+                </a:ext>
+              </a:extLst>
+            </p:cNvPr>
+            <p:cNvSpPr/>
+            <p:nvPr/>
+          </p:nvSpPr>
+          <p:spPr>
+            <a:xfrm>
+              <a:off x="571500" y="1080492"/>
+              <a:ext cx="4611988" cy="2886075"/>
+            </a:xfrm>
+            <a:prstGeom prst="rect">
+              <a:avLst/>
+            </a:prstGeom>
             <a:solidFill>
-              <a:schemeClr val="tx1"/>
+              <a:srgbClr val="2D4D35"/>
             </a:solidFill>
-            <a:tailEnd type="triangle" w="sm" len="sm"/>
-          </a:ln>
-        </p:spPr>
-        <p:style>
-          <a:lnRef idx="1">
-            <a:schemeClr val="accent1"/>
-          </a:lnRef>
-          <a:fillRef idx="0">
-            <a:schemeClr val="accent1"/>
-          </a:fillRef>
-          <a:effectRef idx="0">
-            <a:schemeClr val="accent1"/>
-          </a:effectRef>
-          <a:fontRef idx="minor">
-            <a:schemeClr val="tx1"/>
-          </a:fontRef>
-        </p:style>
-      </p:cxnSp>
-      <p:sp>
-        <p:nvSpPr>
-          <p:cNvPr id="35" name="TextBox 34">
-            <a:extLst>
-              <a:ext uri="{FF2B5EF4-FFF2-40B4-BE49-F238E27FC236}">
-                <a16:creationId xmlns:a16="http://schemas.microsoft.com/office/drawing/2014/main" id="{43925FF8-D135-8CA8-40FD-900732753DA2}"/>
-              </a:ext>
-            </a:extLst>
-          </p:cNvPr>
-          <p:cNvSpPr txBox="1"/>
-          <p:nvPr/>
-        </p:nvSpPr>
-        <p:spPr>
-          <a:xfrm rot="16200000">
-            <a:off x="1689101" y="2071458"/>
-            <a:ext cx="391886" cy="215444"/>
-          </a:xfrm>
-          <a:prstGeom prst="rect">
-            <a:avLst/>
-          </a:prstGeom>
-          <a:noFill/>
-        </p:spPr>
-        <p:txBody>
-          <a:bodyPr wrap="square" rtlCol="0">
-            <a:spAutoFit/>
-          </a:bodyPr>
-          <a:lstStyle/>
-          <a:p>
-            <a:r>
-              <a:rPr lang="af-ZA" sz="800" noProof="0" dirty="0"/>
-              <a:t>het</a:t>
-            </a:r>
-          </a:p>
-        </p:txBody>
-      </p:sp>
-      <p:sp>
-        <p:nvSpPr>
-          <p:cNvPr id="36" name="Rectangle 35">
-            <a:extLst>
-              <a:ext uri="{FF2B5EF4-FFF2-40B4-BE49-F238E27FC236}">
-                <a16:creationId xmlns:a16="http://schemas.microsoft.com/office/drawing/2014/main" id="{AEF24EA1-BEF4-F03A-6DF6-6DED6E1BB012}"/>
-              </a:ext>
-            </a:extLst>
-          </p:cNvPr>
-          <p:cNvSpPr/>
-          <p:nvPr/>
-        </p:nvSpPr>
-        <p:spPr>
-          <a:xfrm>
-            <a:off x="2641599" y="1948543"/>
-            <a:ext cx="1683657" cy="447114"/>
-          </a:xfrm>
-          <a:prstGeom prst="rect">
-            <a:avLst/>
-          </a:prstGeom>
-          <a:solidFill>
-            <a:srgbClr val="2D4D35"/>
-          </a:solidFill>
-          <a:ln>
-            <a:noFill/>
-          </a:ln>
-        </p:spPr>
-        <p:style>
-          <a:lnRef idx="2">
-            <a:schemeClr val="accent1">
-              <a:shade val="15000"/>
-            </a:schemeClr>
-          </a:lnRef>
-          <a:fillRef idx="1">
-            <a:schemeClr val="accent1"/>
-          </a:fillRef>
-          <a:effectRef idx="0">
-            <a:schemeClr val="accent1"/>
-          </a:effectRef>
-          <a:fontRef idx="minor">
-            <a:schemeClr val="lt1"/>
-          </a:fontRef>
-        </p:style>
-        <p:txBody>
-          <a:bodyPr rtlCol="0" anchor="ctr"/>
-          <a:lstStyle/>
-          <a:p>
-            <a:pPr algn="ctr"/>
-            <a:endParaRPr lang="af-ZA" noProof="0" dirty="0"/>
-          </a:p>
-        </p:txBody>
-      </p:sp>
-      <p:cxnSp>
-        <p:nvCxnSpPr>
-          <p:cNvPr id="38" name="Straight Arrow Connector 37">
-            <a:extLst>
-              <a:ext uri="{FF2B5EF4-FFF2-40B4-BE49-F238E27FC236}">
-                <a16:creationId xmlns:a16="http://schemas.microsoft.com/office/drawing/2014/main" id="{3B4A3E0C-CF30-1A2A-53A3-AFD9BE84EB11}"/>
-              </a:ext>
-            </a:extLst>
-          </p:cNvPr>
-          <p:cNvCxnSpPr>
-            <a:cxnSpLocks/>
-          </p:cNvCxnSpPr>
-          <p:nvPr/>
-        </p:nvCxnSpPr>
-        <p:spPr>
-          <a:xfrm flipH="1">
-            <a:off x="3011714" y="1948543"/>
-            <a:ext cx="235857" cy="426580"/>
-          </a:xfrm>
-          <a:prstGeom prst="straightConnector1">
-            <a:avLst/>
-          </a:prstGeom>
-          <a:ln>
-            <a:solidFill>
-              <a:schemeClr val="tx1"/>
-            </a:solidFill>
-            <a:headEnd w="sm" len="sm"/>
-            <a:tailEnd type="triangle" w="sm" len="sm"/>
-          </a:ln>
-        </p:spPr>
-        <p:style>
-          <a:lnRef idx="1">
-            <a:schemeClr val="accent1"/>
-          </a:lnRef>
-          <a:fillRef idx="0">
-            <a:schemeClr val="accent1"/>
-          </a:fillRef>
-          <a:effectRef idx="0">
-            <a:schemeClr val="accent1"/>
-          </a:effectRef>
-          <a:fontRef idx="minor">
-            <a:schemeClr val="tx1"/>
-          </a:fontRef>
-        </p:style>
-      </p:cxnSp>
-      <p:cxnSp>
-        <p:nvCxnSpPr>
-          <p:cNvPr id="40" name="Straight Arrow Connector 39">
-            <a:extLst>
-              <a:ext uri="{FF2B5EF4-FFF2-40B4-BE49-F238E27FC236}">
-                <a16:creationId xmlns:a16="http://schemas.microsoft.com/office/drawing/2014/main" id="{568D2B43-065F-3AF9-F88A-8EC8DFB5C5F6}"/>
-              </a:ext>
-            </a:extLst>
-          </p:cNvPr>
-          <p:cNvCxnSpPr>
-            <a:cxnSpLocks/>
-          </p:cNvCxnSpPr>
-          <p:nvPr/>
-        </p:nvCxnSpPr>
-        <p:spPr>
-          <a:xfrm>
-            <a:off x="3668486" y="1948543"/>
-            <a:ext cx="235857" cy="426580"/>
-          </a:xfrm>
-          <a:prstGeom prst="straightConnector1">
-            <a:avLst/>
-          </a:prstGeom>
-          <a:ln>
-            <a:solidFill>
-              <a:schemeClr val="tx1"/>
-            </a:solidFill>
-            <a:tailEnd type="triangle" w="sm" len="sm"/>
-          </a:ln>
-        </p:spPr>
-        <p:style>
-          <a:lnRef idx="1">
-            <a:schemeClr val="accent1"/>
-          </a:lnRef>
-          <a:fillRef idx="0">
-            <a:schemeClr val="accent1"/>
-          </a:fillRef>
-          <a:effectRef idx="0">
-            <a:schemeClr val="accent1"/>
-          </a:effectRef>
-          <a:fontRef idx="minor">
-            <a:schemeClr val="tx1"/>
-          </a:fontRef>
-        </p:style>
-      </p:cxnSp>
-      <p:sp>
-        <p:nvSpPr>
-          <p:cNvPr id="43" name="TextBox 42">
-            <a:extLst>
-              <a:ext uri="{FF2B5EF4-FFF2-40B4-BE49-F238E27FC236}">
-                <a16:creationId xmlns:a16="http://schemas.microsoft.com/office/drawing/2014/main" id="{5F455E75-2998-D63F-8C85-FE4A3300392F}"/>
-              </a:ext>
-            </a:extLst>
-          </p:cNvPr>
-          <p:cNvSpPr txBox="1"/>
-          <p:nvPr/>
-        </p:nvSpPr>
-        <p:spPr>
-          <a:xfrm rot="17997063">
-            <a:off x="2860466" y="2039637"/>
-            <a:ext cx="391886" cy="215444"/>
-          </a:xfrm>
-          <a:prstGeom prst="rect">
-            <a:avLst/>
-          </a:prstGeom>
-          <a:noFill/>
-        </p:spPr>
-        <p:txBody>
-          <a:bodyPr wrap="square" rtlCol="0">
-            <a:spAutoFit/>
-          </a:bodyPr>
-          <a:lstStyle/>
-          <a:p>
-            <a:r>
-              <a:rPr lang="af-ZA" sz="800" noProof="0" dirty="0"/>
-              <a:t>besit</a:t>
-            </a:r>
-          </a:p>
-        </p:txBody>
-      </p:sp>
-      <p:sp>
-        <p:nvSpPr>
-          <p:cNvPr id="44" name="TextBox 43">
-            <a:extLst>
-              <a:ext uri="{FF2B5EF4-FFF2-40B4-BE49-F238E27FC236}">
-                <a16:creationId xmlns:a16="http://schemas.microsoft.com/office/drawing/2014/main" id="{83461C29-95A4-8D94-56CB-F07DC4A03B89}"/>
-              </a:ext>
-            </a:extLst>
-          </p:cNvPr>
-          <p:cNvSpPr txBox="1"/>
-          <p:nvPr/>
-        </p:nvSpPr>
-        <p:spPr>
-          <a:xfrm rot="3652677">
-            <a:off x="3655794" y="2031627"/>
-            <a:ext cx="410131" cy="215444"/>
-          </a:xfrm>
-          <a:prstGeom prst="rect">
-            <a:avLst/>
-          </a:prstGeom>
-          <a:noFill/>
-        </p:spPr>
-        <p:txBody>
-          <a:bodyPr wrap="square" rtlCol="0">
-            <a:spAutoFit/>
-          </a:bodyPr>
-          <a:lstStyle/>
-          <a:p>
-            <a:r>
-              <a:rPr lang="af-ZA" sz="800" noProof="0" dirty="0"/>
-              <a:t>plaas</a:t>
-            </a:r>
-          </a:p>
-        </p:txBody>
-      </p:sp>
-      <p:sp>
-        <p:nvSpPr>
-          <p:cNvPr id="46" name="Rectangle 45">
-            <a:extLst>
-              <a:ext uri="{FF2B5EF4-FFF2-40B4-BE49-F238E27FC236}">
-                <a16:creationId xmlns:a16="http://schemas.microsoft.com/office/drawing/2014/main" id="{5F5A3053-A6ED-36C2-CAFB-2974C2995CDE}"/>
-              </a:ext>
-            </a:extLst>
-          </p:cNvPr>
-          <p:cNvSpPr/>
-          <p:nvPr/>
-        </p:nvSpPr>
-        <p:spPr>
-          <a:xfrm>
-            <a:off x="3617687" y="2977465"/>
-            <a:ext cx="575230" cy="335421"/>
-          </a:xfrm>
-          <a:prstGeom prst="rect">
-            <a:avLst/>
-          </a:prstGeom>
-          <a:solidFill>
-            <a:srgbClr val="2D4D35"/>
-          </a:solidFill>
-          <a:ln>
-            <a:noFill/>
-          </a:ln>
-        </p:spPr>
-        <p:style>
-          <a:lnRef idx="2">
-            <a:schemeClr val="accent1">
-              <a:shade val="15000"/>
-            </a:schemeClr>
-          </a:lnRef>
-          <a:fillRef idx="1">
-            <a:schemeClr val="accent1"/>
-          </a:fillRef>
-          <a:effectRef idx="0">
-            <a:schemeClr val="accent1"/>
-          </a:effectRef>
-          <a:fontRef idx="minor">
-            <a:schemeClr val="lt1"/>
-          </a:fontRef>
-        </p:style>
-        <p:txBody>
-          <a:bodyPr rtlCol="0" anchor="ctr"/>
-          <a:lstStyle/>
-          <a:p>
-            <a:pPr algn="ctr"/>
-            <a:endParaRPr lang="af-ZA" noProof="0" dirty="0"/>
-          </a:p>
-        </p:txBody>
-      </p:sp>
-      <p:cxnSp>
-        <p:nvCxnSpPr>
-          <p:cNvPr id="47" name="Straight Arrow Connector 46">
-            <a:extLst>
-              <a:ext uri="{FF2B5EF4-FFF2-40B4-BE49-F238E27FC236}">
-                <a16:creationId xmlns:a16="http://schemas.microsoft.com/office/drawing/2014/main" id="{9788811F-5749-3454-35E7-EE410CC356FC}"/>
-              </a:ext>
-            </a:extLst>
-          </p:cNvPr>
-          <p:cNvCxnSpPr>
-            <a:cxnSpLocks/>
-          </p:cNvCxnSpPr>
-          <p:nvPr/>
-        </p:nvCxnSpPr>
-        <p:spPr>
-          <a:xfrm>
-            <a:off x="3904343" y="2977465"/>
-            <a:ext cx="0" cy="335421"/>
-          </a:xfrm>
-          <a:prstGeom prst="straightConnector1">
-            <a:avLst/>
-          </a:prstGeom>
-          <a:ln>
-            <a:solidFill>
-              <a:schemeClr val="tx1"/>
-            </a:solidFill>
-            <a:tailEnd type="triangle" w="sm" len="sm"/>
-          </a:ln>
-        </p:spPr>
-        <p:style>
-          <a:lnRef idx="1">
-            <a:schemeClr val="accent1"/>
-          </a:lnRef>
-          <a:fillRef idx="0">
-            <a:schemeClr val="accent1"/>
-          </a:fillRef>
-          <a:effectRef idx="0">
-            <a:schemeClr val="accent1"/>
-          </a:effectRef>
-          <a:fontRef idx="minor">
-            <a:schemeClr val="tx1"/>
-          </a:fontRef>
-        </p:style>
-      </p:cxnSp>
-      <p:sp>
-        <p:nvSpPr>
-          <p:cNvPr id="45" name="TextBox 44">
-            <a:extLst>
-              <a:ext uri="{FF2B5EF4-FFF2-40B4-BE49-F238E27FC236}">
-                <a16:creationId xmlns:a16="http://schemas.microsoft.com/office/drawing/2014/main" id="{652EF16D-FC6E-077C-5E8C-0FD7CE6DC5B2}"/>
-              </a:ext>
-            </a:extLst>
-          </p:cNvPr>
-          <p:cNvSpPr txBox="1"/>
-          <p:nvPr/>
-        </p:nvSpPr>
-        <p:spPr>
-          <a:xfrm rot="16200000">
-            <a:off x="3622009" y="3018054"/>
-            <a:ext cx="423075" cy="215444"/>
-          </a:xfrm>
-          <a:prstGeom prst="rect">
-            <a:avLst/>
-          </a:prstGeom>
-          <a:noFill/>
-        </p:spPr>
-        <p:txBody>
-          <a:bodyPr wrap="square" rtlCol="0">
-            <a:spAutoFit/>
-          </a:bodyPr>
-          <a:lstStyle/>
-          <a:p>
-            <a:r>
-              <a:rPr lang="af-ZA" sz="800" noProof="0" dirty="0"/>
-              <a:t>bevat</a:t>
-            </a:r>
-          </a:p>
-        </p:txBody>
-      </p:sp>
+            <a:ln w="28575">
+              <a:solidFill>
+                <a:srgbClr val="1B3022"/>
+              </a:solidFill>
+            </a:ln>
+          </p:spPr>
+          <p:style>
+            <a:lnRef idx="2">
+              <a:schemeClr val="accent1">
+                <a:shade val="15000"/>
+              </a:schemeClr>
+            </a:lnRef>
+            <a:fillRef idx="1">
+              <a:schemeClr val="accent1"/>
+            </a:fillRef>
+            <a:effectRef idx="0">
+              <a:schemeClr val="accent1"/>
+            </a:effectRef>
+            <a:fontRef idx="minor">
+              <a:schemeClr val="lt1"/>
+            </a:fontRef>
+          </p:style>
+          <p:txBody>
+            <a:bodyPr rtlCol="0" anchor="ctr"/>
+            <a:lstStyle/>
+            <a:p>
+              <a:pPr algn="ctr"/>
+              <a:endParaRPr lang="af-ZA" noProof="0" dirty="0"/>
+            </a:p>
+          </p:txBody>
+        </p:sp>
+        <p:grpSp>
+          <p:nvGrpSpPr>
+            <p:cNvPr id="2" name="Group 1">
+              <a:extLst>
+                <a:ext uri="{FF2B5EF4-FFF2-40B4-BE49-F238E27FC236}">
+                  <a16:creationId xmlns:a16="http://schemas.microsoft.com/office/drawing/2014/main" id="{F4D58214-F89F-2F5D-8756-7E41B6C6580E}"/>
+                </a:ext>
+              </a:extLst>
+            </p:cNvPr>
+            <p:cNvGrpSpPr>
+              <a:grpSpLocks noChangeAspect="1"/>
+            </p:cNvGrpSpPr>
+            <p:nvPr/>
+          </p:nvGrpSpPr>
+          <p:grpSpPr>
+            <a:xfrm>
+              <a:off x="663494" y="1228960"/>
+              <a:ext cx="4428000" cy="2589300"/>
+              <a:chOff x="742334" y="1313583"/>
+              <a:chExt cx="4267620" cy="2495517"/>
+            </a:xfrm>
+          </p:grpSpPr>
+          <p:pic>
+            <p:nvPicPr>
+              <p:cNvPr id="31" name="Picture 30">
+                <a:extLst>
+                  <a:ext uri="{FF2B5EF4-FFF2-40B4-BE49-F238E27FC236}">
+                    <a16:creationId xmlns:a16="http://schemas.microsoft.com/office/drawing/2014/main" id="{C56CD78B-6B15-B355-C11B-F5E5FC90BD9C}"/>
+                  </a:ext>
+                </a:extLst>
+              </p:cNvPr>
+              <p:cNvPicPr>
+                <a:picLocks noChangeAspect="1"/>
+              </p:cNvPicPr>
+              <p:nvPr/>
+            </p:nvPicPr>
+            <p:blipFill>
+              <a:blip r:embed="rId4"/>
+              <a:srcRect/>
+              <a:stretch/>
+            </p:blipFill>
+            <p:spPr>
+              <a:xfrm>
+                <a:off x="742334" y="1313583"/>
+                <a:ext cx="4267620" cy="2495517"/>
+              </a:xfrm>
+              <a:prstGeom prst="rect">
+                <a:avLst/>
+              </a:prstGeom>
+            </p:spPr>
+          </p:pic>
+          <p:sp>
+            <p:nvSpPr>
+              <p:cNvPr id="32" name="Rectangle 31">
+                <a:extLst>
+                  <a:ext uri="{FF2B5EF4-FFF2-40B4-BE49-F238E27FC236}">
+                    <a16:creationId xmlns:a16="http://schemas.microsoft.com/office/drawing/2014/main" id="{B8B6CF8C-A31B-CB86-547D-0DC748EAD3C9}"/>
+                  </a:ext>
+                </a:extLst>
+              </p:cNvPr>
+              <p:cNvSpPr/>
+              <p:nvPr/>
+            </p:nvSpPr>
+            <p:spPr>
+              <a:xfrm>
+                <a:off x="1857829" y="2038801"/>
+                <a:ext cx="177800" cy="393954"/>
+              </a:xfrm>
+              <a:prstGeom prst="rect">
+                <a:avLst/>
+              </a:prstGeom>
+              <a:solidFill>
+                <a:srgbClr val="2D4D35"/>
+              </a:solidFill>
+              <a:ln>
+                <a:noFill/>
+              </a:ln>
+            </p:spPr>
+            <p:style>
+              <a:lnRef idx="2">
+                <a:schemeClr val="accent1">
+                  <a:shade val="15000"/>
+                </a:schemeClr>
+              </a:lnRef>
+              <a:fillRef idx="1">
+                <a:schemeClr val="accent1"/>
+              </a:fillRef>
+              <a:effectRef idx="0">
+                <a:schemeClr val="accent1"/>
+              </a:effectRef>
+              <a:fontRef idx="minor">
+                <a:schemeClr val="lt1"/>
+              </a:fontRef>
+            </p:style>
+            <p:txBody>
+              <a:bodyPr rtlCol="0" anchor="ctr"/>
+              <a:lstStyle/>
+              <a:p>
+                <a:pPr algn="ctr"/>
+                <a:endParaRPr lang="af-ZA" noProof="0" dirty="0"/>
+              </a:p>
+            </p:txBody>
+          </p:sp>
+          <p:cxnSp>
+            <p:nvCxnSpPr>
+              <p:cNvPr id="34" name="Straight Arrow Connector 33">
+                <a:extLst>
+                  <a:ext uri="{FF2B5EF4-FFF2-40B4-BE49-F238E27FC236}">
+                    <a16:creationId xmlns:a16="http://schemas.microsoft.com/office/drawing/2014/main" id="{A702B211-97A6-50F3-6426-232AE5A85133}"/>
+                  </a:ext>
+                </a:extLst>
+              </p:cNvPr>
+              <p:cNvCxnSpPr/>
+              <p:nvPr/>
+            </p:nvCxnSpPr>
+            <p:spPr>
+              <a:xfrm>
+                <a:off x="1944914" y="2038801"/>
+                <a:ext cx="0" cy="402883"/>
+              </a:xfrm>
+              <a:prstGeom prst="straightConnector1">
+                <a:avLst/>
+              </a:prstGeom>
+              <a:ln>
+                <a:solidFill>
+                  <a:schemeClr val="tx1"/>
+                </a:solidFill>
+                <a:tailEnd type="triangle" w="sm" len="sm"/>
+              </a:ln>
+            </p:spPr>
+            <p:style>
+              <a:lnRef idx="1">
+                <a:schemeClr val="accent1"/>
+              </a:lnRef>
+              <a:fillRef idx="0">
+                <a:schemeClr val="accent1"/>
+              </a:fillRef>
+              <a:effectRef idx="0">
+                <a:schemeClr val="accent1"/>
+              </a:effectRef>
+              <a:fontRef idx="minor">
+                <a:schemeClr val="tx1"/>
+              </a:fontRef>
+            </p:style>
+          </p:cxnSp>
+          <p:sp>
+            <p:nvSpPr>
+              <p:cNvPr id="35" name="TextBox 34">
+                <a:extLst>
+                  <a:ext uri="{FF2B5EF4-FFF2-40B4-BE49-F238E27FC236}">
+                    <a16:creationId xmlns:a16="http://schemas.microsoft.com/office/drawing/2014/main" id="{43925FF8-D135-8CA8-40FD-900732753DA2}"/>
+                  </a:ext>
+                </a:extLst>
+              </p:cNvPr>
+              <p:cNvSpPr txBox="1"/>
+              <p:nvPr/>
+            </p:nvSpPr>
+            <p:spPr>
+              <a:xfrm rot="16200000">
+                <a:off x="1689101" y="2071458"/>
+                <a:ext cx="391886" cy="215444"/>
+              </a:xfrm>
+              <a:prstGeom prst="rect">
+                <a:avLst/>
+              </a:prstGeom>
+              <a:noFill/>
+            </p:spPr>
+            <p:txBody>
+              <a:bodyPr wrap="square" rtlCol="0">
+                <a:spAutoFit/>
+              </a:bodyPr>
+              <a:lstStyle/>
+              <a:p>
+                <a:r>
+                  <a:rPr lang="af-ZA" sz="800" noProof="0" dirty="0"/>
+                  <a:t>het</a:t>
+                </a:r>
+              </a:p>
+            </p:txBody>
+          </p:sp>
+          <p:sp>
+            <p:nvSpPr>
+              <p:cNvPr id="36" name="Rectangle 35">
+                <a:extLst>
+                  <a:ext uri="{FF2B5EF4-FFF2-40B4-BE49-F238E27FC236}">
+                    <a16:creationId xmlns:a16="http://schemas.microsoft.com/office/drawing/2014/main" id="{AEF24EA1-BEF4-F03A-6DF6-6DED6E1BB012}"/>
+                  </a:ext>
+                </a:extLst>
+              </p:cNvPr>
+              <p:cNvSpPr/>
+              <p:nvPr/>
+            </p:nvSpPr>
+            <p:spPr>
+              <a:xfrm>
+                <a:off x="2641599" y="1948543"/>
+                <a:ext cx="1683657" cy="447114"/>
+              </a:xfrm>
+              <a:prstGeom prst="rect">
+                <a:avLst/>
+              </a:prstGeom>
+              <a:solidFill>
+                <a:srgbClr val="2D4D35"/>
+              </a:solidFill>
+              <a:ln>
+                <a:noFill/>
+              </a:ln>
+            </p:spPr>
+            <p:style>
+              <a:lnRef idx="2">
+                <a:schemeClr val="accent1">
+                  <a:shade val="15000"/>
+                </a:schemeClr>
+              </a:lnRef>
+              <a:fillRef idx="1">
+                <a:schemeClr val="accent1"/>
+              </a:fillRef>
+              <a:effectRef idx="0">
+                <a:schemeClr val="accent1"/>
+              </a:effectRef>
+              <a:fontRef idx="minor">
+                <a:schemeClr val="lt1"/>
+              </a:fontRef>
+            </p:style>
+            <p:txBody>
+              <a:bodyPr rtlCol="0" anchor="ctr"/>
+              <a:lstStyle/>
+              <a:p>
+                <a:pPr algn="ctr"/>
+                <a:endParaRPr lang="af-ZA" noProof="0" dirty="0"/>
+              </a:p>
+            </p:txBody>
+          </p:sp>
+          <p:cxnSp>
+            <p:nvCxnSpPr>
+              <p:cNvPr id="38" name="Straight Arrow Connector 37">
+                <a:extLst>
+                  <a:ext uri="{FF2B5EF4-FFF2-40B4-BE49-F238E27FC236}">
+                    <a16:creationId xmlns:a16="http://schemas.microsoft.com/office/drawing/2014/main" id="{3B4A3E0C-CF30-1A2A-53A3-AFD9BE84EB11}"/>
+                  </a:ext>
+                </a:extLst>
+              </p:cNvPr>
+              <p:cNvCxnSpPr>
+                <a:cxnSpLocks/>
+              </p:cNvCxnSpPr>
+              <p:nvPr/>
+            </p:nvCxnSpPr>
+            <p:spPr>
+              <a:xfrm flipH="1">
+                <a:off x="3011714" y="1948543"/>
+                <a:ext cx="235857" cy="426580"/>
+              </a:xfrm>
+              <a:prstGeom prst="straightConnector1">
+                <a:avLst/>
+              </a:prstGeom>
+              <a:ln>
+                <a:solidFill>
+                  <a:schemeClr val="tx1"/>
+                </a:solidFill>
+                <a:headEnd w="sm" len="sm"/>
+                <a:tailEnd type="triangle" w="sm" len="sm"/>
+              </a:ln>
+            </p:spPr>
+            <p:style>
+              <a:lnRef idx="1">
+                <a:schemeClr val="accent1"/>
+              </a:lnRef>
+              <a:fillRef idx="0">
+                <a:schemeClr val="accent1"/>
+              </a:fillRef>
+              <a:effectRef idx="0">
+                <a:schemeClr val="accent1"/>
+              </a:effectRef>
+              <a:fontRef idx="minor">
+                <a:schemeClr val="tx1"/>
+              </a:fontRef>
+            </p:style>
+          </p:cxnSp>
+          <p:cxnSp>
+            <p:nvCxnSpPr>
+              <p:cNvPr id="40" name="Straight Arrow Connector 39">
+                <a:extLst>
+                  <a:ext uri="{FF2B5EF4-FFF2-40B4-BE49-F238E27FC236}">
+                    <a16:creationId xmlns:a16="http://schemas.microsoft.com/office/drawing/2014/main" id="{568D2B43-065F-3AF9-F88A-8EC8DFB5C5F6}"/>
+                  </a:ext>
+                </a:extLst>
+              </p:cNvPr>
+              <p:cNvCxnSpPr>
+                <a:cxnSpLocks/>
+              </p:cNvCxnSpPr>
+              <p:nvPr/>
+            </p:nvCxnSpPr>
+            <p:spPr>
+              <a:xfrm>
+                <a:off x="3668486" y="1948543"/>
+                <a:ext cx="235857" cy="426580"/>
+              </a:xfrm>
+              <a:prstGeom prst="straightConnector1">
+                <a:avLst/>
+              </a:prstGeom>
+              <a:ln>
+                <a:solidFill>
+                  <a:schemeClr val="tx1"/>
+                </a:solidFill>
+                <a:tailEnd type="triangle" w="sm" len="sm"/>
+              </a:ln>
+            </p:spPr>
+            <p:style>
+              <a:lnRef idx="1">
+                <a:schemeClr val="accent1"/>
+              </a:lnRef>
+              <a:fillRef idx="0">
+                <a:schemeClr val="accent1"/>
+              </a:fillRef>
+              <a:effectRef idx="0">
+                <a:schemeClr val="accent1"/>
+              </a:effectRef>
+              <a:fontRef idx="minor">
+                <a:schemeClr val="tx1"/>
+              </a:fontRef>
+            </p:style>
+          </p:cxnSp>
+          <p:sp>
+            <p:nvSpPr>
+              <p:cNvPr id="43" name="TextBox 42">
+                <a:extLst>
+                  <a:ext uri="{FF2B5EF4-FFF2-40B4-BE49-F238E27FC236}">
+                    <a16:creationId xmlns:a16="http://schemas.microsoft.com/office/drawing/2014/main" id="{5F455E75-2998-D63F-8C85-FE4A3300392F}"/>
+                  </a:ext>
+                </a:extLst>
+              </p:cNvPr>
+              <p:cNvSpPr txBox="1"/>
+              <p:nvPr/>
+            </p:nvSpPr>
+            <p:spPr>
+              <a:xfrm rot="17997063">
+                <a:off x="2860466" y="2039637"/>
+                <a:ext cx="391886" cy="215444"/>
+              </a:xfrm>
+              <a:prstGeom prst="rect">
+                <a:avLst/>
+              </a:prstGeom>
+              <a:noFill/>
+            </p:spPr>
+            <p:txBody>
+              <a:bodyPr wrap="square" rtlCol="0">
+                <a:spAutoFit/>
+              </a:bodyPr>
+              <a:lstStyle/>
+              <a:p>
+                <a:r>
+                  <a:rPr lang="af-ZA" sz="800" noProof="0" dirty="0"/>
+                  <a:t>besit</a:t>
+                </a:r>
+              </a:p>
+            </p:txBody>
+          </p:sp>
+          <p:sp>
+            <p:nvSpPr>
+              <p:cNvPr id="44" name="TextBox 43">
+                <a:extLst>
+                  <a:ext uri="{FF2B5EF4-FFF2-40B4-BE49-F238E27FC236}">
+                    <a16:creationId xmlns:a16="http://schemas.microsoft.com/office/drawing/2014/main" id="{83461C29-95A4-8D94-56CB-F07DC4A03B89}"/>
+                  </a:ext>
+                </a:extLst>
+              </p:cNvPr>
+              <p:cNvSpPr txBox="1"/>
+              <p:nvPr/>
+            </p:nvSpPr>
+            <p:spPr>
+              <a:xfrm rot="3652677">
+                <a:off x="3655794" y="2031627"/>
+                <a:ext cx="410131" cy="215444"/>
+              </a:xfrm>
+              <a:prstGeom prst="rect">
+                <a:avLst/>
+              </a:prstGeom>
+              <a:noFill/>
+            </p:spPr>
+            <p:txBody>
+              <a:bodyPr wrap="square" rtlCol="0">
+                <a:spAutoFit/>
+              </a:bodyPr>
+              <a:lstStyle/>
+              <a:p>
+                <a:r>
+                  <a:rPr lang="af-ZA" sz="800" noProof="0" dirty="0"/>
+                  <a:t>plaas</a:t>
+                </a:r>
+              </a:p>
+            </p:txBody>
+          </p:sp>
+          <p:sp>
+            <p:nvSpPr>
+              <p:cNvPr id="46" name="Rectangle 45">
+                <a:extLst>
+                  <a:ext uri="{FF2B5EF4-FFF2-40B4-BE49-F238E27FC236}">
+                    <a16:creationId xmlns:a16="http://schemas.microsoft.com/office/drawing/2014/main" id="{5F5A3053-A6ED-36C2-CAFB-2974C2995CDE}"/>
+                  </a:ext>
+                </a:extLst>
+              </p:cNvPr>
+              <p:cNvSpPr/>
+              <p:nvPr/>
+            </p:nvSpPr>
+            <p:spPr>
+              <a:xfrm>
+                <a:off x="3617687" y="2977465"/>
+                <a:ext cx="575230" cy="335421"/>
+              </a:xfrm>
+              <a:prstGeom prst="rect">
+                <a:avLst/>
+              </a:prstGeom>
+              <a:solidFill>
+                <a:srgbClr val="2D4D35"/>
+              </a:solidFill>
+              <a:ln>
+                <a:noFill/>
+              </a:ln>
+            </p:spPr>
+            <p:style>
+              <a:lnRef idx="2">
+                <a:schemeClr val="accent1">
+                  <a:shade val="15000"/>
+                </a:schemeClr>
+              </a:lnRef>
+              <a:fillRef idx="1">
+                <a:schemeClr val="accent1"/>
+              </a:fillRef>
+              <a:effectRef idx="0">
+                <a:schemeClr val="accent1"/>
+              </a:effectRef>
+              <a:fontRef idx="minor">
+                <a:schemeClr val="lt1"/>
+              </a:fontRef>
+            </p:style>
+            <p:txBody>
+              <a:bodyPr rtlCol="0" anchor="ctr"/>
+              <a:lstStyle/>
+              <a:p>
+                <a:pPr algn="ctr"/>
+                <a:endParaRPr lang="af-ZA" noProof="0" dirty="0"/>
+              </a:p>
+            </p:txBody>
+          </p:sp>
+          <p:cxnSp>
+            <p:nvCxnSpPr>
+              <p:cNvPr id="47" name="Straight Arrow Connector 46">
+                <a:extLst>
+                  <a:ext uri="{FF2B5EF4-FFF2-40B4-BE49-F238E27FC236}">
+                    <a16:creationId xmlns:a16="http://schemas.microsoft.com/office/drawing/2014/main" id="{9788811F-5749-3454-35E7-EE410CC356FC}"/>
+                  </a:ext>
+                </a:extLst>
+              </p:cNvPr>
+              <p:cNvCxnSpPr>
+                <a:cxnSpLocks/>
+              </p:cNvCxnSpPr>
+              <p:nvPr/>
+            </p:nvCxnSpPr>
+            <p:spPr>
+              <a:xfrm>
+                <a:off x="3904343" y="2977465"/>
+                <a:ext cx="0" cy="335421"/>
+              </a:xfrm>
+              <a:prstGeom prst="straightConnector1">
+                <a:avLst/>
+              </a:prstGeom>
+              <a:ln>
+                <a:solidFill>
+                  <a:schemeClr val="tx1"/>
+                </a:solidFill>
+                <a:tailEnd type="triangle" w="sm" len="sm"/>
+              </a:ln>
+            </p:spPr>
+            <p:style>
+              <a:lnRef idx="1">
+                <a:schemeClr val="accent1"/>
+              </a:lnRef>
+              <a:fillRef idx="0">
+                <a:schemeClr val="accent1"/>
+              </a:fillRef>
+              <a:effectRef idx="0">
+                <a:schemeClr val="accent1"/>
+              </a:effectRef>
+              <a:fontRef idx="minor">
+                <a:schemeClr val="tx1"/>
+              </a:fontRef>
+            </p:style>
+          </p:cxnSp>
+          <p:sp>
+            <p:nvSpPr>
+              <p:cNvPr id="45" name="TextBox 44">
+                <a:extLst>
+                  <a:ext uri="{FF2B5EF4-FFF2-40B4-BE49-F238E27FC236}">
+                    <a16:creationId xmlns:a16="http://schemas.microsoft.com/office/drawing/2014/main" id="{652EF16D-FC6E-077C-5E8C-0FD7CE6DC5B2}"/>
+                  </a:ext>
+                </a:extLst>
+              </p:cNvPr>
+              <p:cNvSpPr txBox="1"/>
+              <p:nvPr/>
+            </p:nvSpPr>
+            <p:spPr>
+              <a:xfrm rot="16200000">
+                <a:off x="3622009" y="3018054"/>
+                <a:ext cx="423075" cy="215444"/>
+              </a:xfrm>
+              <a:prstGeom prst="rect">
+                <a:avLst/>
+              </a:prstGeom>
+              <a:noFill/>
+            </p:spPr>
+            <p:txBody>
+              <a:bodyPr wrap="square" rtlCol="0">
+                <a:spAutoFit/>
+              </a:bodyPr>
+              <a:lstStyle/>
+              <a:p>
+                <a:r>
+                  <a:rPr lang="af-ZA" sz="800" noProof="0" dirty="0"/>
+                  <a:t>bevat</a:t>
+                </a:r>
+              </a:p>
+            </p:txBody>
+          </p:sp>
+        </p:grpSp>
+      </p:grpSp>
     </p:spTree>
   </p:cSld>
   <p:clrMapOvr>
